--- a/Update_Slides/FYP_Weekly_Update_Slides_19March.pptx
+++ b/Update_Slides/FYP_Weekly_Update_Slides_19March.pptx
@@ -230,7 +230,7 @@
           <a:p>
             <a:fld id="{C03BD9BC-DEF3-4382-83D6-5C0A0444C18A}" type="datetimeFigureOut">
               <a:rPr lang="en-SG" smtClean="0"/>
-              <a:t>18/3/2026</a:t>
+              <a:t>4/4/2026</a:t>
             </a:fld>
             <a:endParaRPr lang="en-SG"/>
           </a:p>
@@ -1062,7 +1062,7 @@
           <a:p>
             <a:fld id="{0EAFE32E-95B7-4367-9495-9CBC389572F3}" type="datetimeFigureOut">
               <a:rPr lang="en-SG" smtClean="0"/>
-              <a:t>18/3/2026</a:t>
+              <a:t>4/4/2026</a:t>
             </a:fld>
             <a:endParaRPr lang="en-SG"/>
           </a:p>
@@ -1270,7 +1270,7 @@
           <a:p>
             <a:fld id="{0EAFE32E-95B7-4367-9495-9CBC389572F3}" type="datetimeFigureOut">
               <a:rPr lang="en-SG" smtClean="0"/>
-              <a:t>18/3/2026</a:t>
+              <a:t>4/4/2026</a:t>
             </a:fld>
             <a:endParaRPr lang="en-SG"/>
           </a:p>
@@ -1526,7 +1526,7 @@
           <a:p>
             <a:fld id="{0EAFE32E-95B7-4367-9495-9CBC389572F3}" type="datetimeFigureOut">
               <a:rPr lang="en-SG" smtClean="0"/>
-              <a:t>18/3/2026</a:t>
+              <a:t>4/4/2026</a:t>
             </a:fld>
             <a:endParaRPr lang="en-SG"/>
           </a:p>
@@ -1700,7 +1700,7 @@
           <a:p>
             <a:fld id="{0EAFE32E-95B7-4367-9495-9CBC389572F3}" type="datetimeFigureOut">
               <a:rPr lang="en-SG" smtClean="0"/>
-              <a:t>18/3/2026</a:t>
+              <a:t>4/4/2026</a:t>
             </a:fld>
             <a:endParaRPr lang="en-SG"/>
           </a:p>
@@ -2043,7 +2043,7 @@
           <a:p>
             <a:fld id="{0EAFE32E-95B7-4367-9495-9CBC389572F3}" type="datetimeFigureOut">
               <a:rPr lang="en-SG" smtClean="0"/>
-              <a:t>18/3/2026</a:t>
+              <a:t>4/4/2026</a:t>
             </a:fld>
             <a:endParaRPr lang="en-SG"/>
           </a:p>
@@ -2318,7 +2318,7 @@
           <a:p>
             <a:fld id="{0EAFE32E-95B7-4367-9495-9CBC389572F3}" type="datetimeFigureOut">
               <a:rPr lang="en-SG" smtClean="0"/>
-              <a:t>18/3/2026</a:t>
+              <a:t>4/4/2026</a:t>
             </a:fld>
             <a:endParaRPr lang="en-SG"/>
           </a:p>
@@ -2697,7 +2697,7 @@
           <a:p>
             <a:fld id="{0EAFE32E-95B7-4367-9495-9CBC389572F3}" type="datetimeFigureOut">
               <a:rPr lang="en-SG" smtClean="0"/>
-              <a:t>18/3/2026</a:t>
+              <a:t>4/4/2026</a:t>
             </a:fld>
             <a:endParaRPr lang="en-SG"/>
           </a:p>
@@ -2815,7 +2815,7 @@
           <a:p>
             <a:fld id="{0EAFE32E-95B7-4367-9495-9CBC389572F3}" type="datetimeFigureOut">
               <a:rPr lang="en-SG" smtClean="0"/>
-              <a:t>18/3/2026</a:t>
+              <a:t>4/4/2026</a:t>
             </a:fld>
             <a:endParaRPr lang="en-SG"/>
           </a:p>
@@ -2986,7 +2986,7 @@
           <a:p>
             <a:fld id="{0EAFE32E-95B7-4367-9495-9CBC389572F3}" type="datetimeFigureOut">
               <a:rPr lang="en-SG" smtClean="0"/>
-              <a:t>18/3/2026</a:t>
+              <a:t>4/4/2026</a:t>
             </a:fld>
             <a:endParaRPr lang="en-SG"/>
           </a:p>
@@ -3340,7 +3340,7 @@
           <a:p>
             <a:fld id="{0EAFE32E-95B7-4367-9495-9CBC389572F3}" type="datetimeFigureOut">
               <a:rPr lang="en-SG" smtClean="0"/>
-              <a:t>18/3/2026</a:t>
+              <a:t>4/4/2026</a:t>
             </a:fld>
             <a:endParaRPr lang="en-SG"/>
           </a:p>
@@ -3722,7 +3722,7 @@
           <a:p>
             <a:fld id="{0EAFE32E-95B7-4367-9495-9CBC389572F3}" type="datetimeFigureOut">
               <a:rPr lang="en-SG" smtClean="0"/>
-              <a:t>18/3/2026</a:t>
+              <a:t>4/4/2026</a:t>
             </a:fld>
             <a:endParaRPr lang="en-SG"/>
           </a:p>
@@ -4023,7 +4023,7 @@
           <a:p>
             <a:fld id="{0EAFE32E-95B7-4367-9495-9CBC389572F3}" type="datetimeFigureOut">
               <a:rPr lang="en-SG" smtClean="0"/>
-              <a:t>18/3/2026</a:t>
+              <a:t>4/4/2026</a:t>
             </a:fld>
             <a:endParaRPr lang="en-SG"/>
           </a:p>
@@ -6430,7 +6430,7 @@
         </p:blipFill>
         <p:spPr>
           <a:xfrm>
-            <a:off x="443229" y="2440598"/>
+            <a:off x="458469" y="2440600"/>
             <a:ext cx="5419088" cy="3466949"/>
           </a:xfrm>
           <a:prstGeom prst="rect">
@@ -6460,7 +6460,7 @@
         </p:blipFill>
         <p:spPr>
           <a:xfrm>
-            <a:off x="6329685" y="2440598"/>
+            <a:off x="6344925" y="2440600"/>
             <a:ext cx="5419088" cy="3466949"/>
           </a:xfrm>
           <a:prstGeom prst="rect">
@@ -7876,7 +7876,7 @@
         </p:blipFill>
         <p:spPr>
           <a:xfrm>
-            <a:off x="287907" y="2288844"/>
+            <a:off x="287906" y="2288844"/>
             <a:ext cx="5511998" cy="3526389"/>
           </a:xfrm>
           <a:prstGeom prst="rect">
@@ -8183,7 +8183,7 @@
         </p:blipFill>
         <p:spPr>
           <a:xfrm>
-            <a:off x="6559263" y="2808321"/>
+            <a:off x="6559263" y="2815941"/>
             <a:ext cx="4860808" cy="3109780"/>
           </a:xfrm>
           <a:prstGeom prst="rect">
@@ -8983,7 +8983,7 @@
         </p:blipFill>
         <p:spPr>
           <a:xfrm>
-            <a:off x="6296973" y="2420705"/>
+            <a:off x="6296973" y="2428325"/>
             <a:ext cx="5116369" cy="3273279"/>
           </a:xfrm>
           <a:prstGeom prst="rect">
@@ -10872,7 +10872,7 @@
         </p:blipFill>
         <p:spPr>
           <a:xfrm>
-            <a:off x="6271785" y="2580670"/>
+            <a:off x="6271787" y="2580670"/>
             <a:ext cx="5332487" cy="3360450"/>
           </a:xfrm>
           <a:prstGeom prst="rect">
@@ -14131,8 +14131,8 @@
           </a:p>
         </p:txBody>
       </p:sp>
-      <mc:AlternateContent xmlns:mc="http://schemas.openxmlformats.org/markup-compatibility/2006" xmlns:a14="http://schemas.microsoft.com/office/drawing/2010/main">
-        <mc:Choice Requires="a14">
+      <mc:AlternateContent xmlns:mc="http://schemas.openxmlformats.org/markup-compatibility/2006">
+        <mc:Choice xmlns:a14="http://schemas.microsoft.com/office/drawing/2010/main" Requires="a14">
           <p:graphicFrame>
             <p:nvGraphicFramePr>
               <p:cNvPr id="5" name="Table 4">
@@ -14148,14 +14148,14 @@
               <p:nvPr>
                 <p:extLst>
                   <p:ext uri="{D42A27DB-BD31-4B8C-83A1-F6EECF244321}">
-                    <p14:modId xmlns:p14="http://schemas.microsoft.com/office/powerpoint/2010/main" val="644013560"/>
+                    <p14:modId xmlns:p14="http://schemas.microsoft.com/office/powerpoint/2010/main" val="386418082"/>
                   </p:ext>
                 </p:extLst>
               </p:nvPr>
             </p:nvGraphicFramePr>
             <p:xfrm>
               <a:off x="6696365" y="2588471"/>
-              <a:ext cx="5292204" cy="3250311"/>
+              <a:ext cx="5292204" cy="3372231"/>
             </p:xfrm>
             <a:graphic>
               <a:graphicData uri="http://schemas.openxmlformats.org/drawingml/2006/table">
@@ -14424,11 +14424,20 @@
                             <a:buNone/>
                           </a:pPr>
                           <a:r>
-                            <a:rPr lang="en-SG" sz="1600" dirty="0">
+                            <a:rPr lang="en-SG" sz="1800" b="0" i="0" kern="1200" dirty="0">
+                              <a:solidFill>
+                                <a:schemeClr val="dk1"/>
+                              </a:solidFill>
                               <a:effectLst/>
+                              <a:latin typeface="+mn-lt"/>
+                              <a:ea typeface="+mn-ea"/>
+                              <a:cs typeface="+mn-cs"/>
                             </a:rPr>
-                            <a:t>4.0</a:t>
+                            <a:t>4.6</a:t>
                           </a:r>
+                          <a:endParaRPr lang="en-SG" sz="1600" dirty="0">
+                            <a:effectLst/>
+                          </a:endParaRPr>
                         </a:p>
                       </a:txBody>
                       <a:tcPr anchor="ctr"/>
@@ -14485,11 +14494,20 @@
                             <a:buNone/>
                           </a:pPr>
                           <a:r>
-                            <a:rPr lang="en-SG" sz="1600" dirty="0">
+                            <a:rPr lang="en-SG" sz="1800" b="0" i="0" kern="1200" dirty="0">
+                              <a:solidFill>
+                                <a:schemeClr val="dk1"/>
+                              </a:solidFill>
                               <a:effectLst/>
+                              <a:latin typeface="+mn-lt"/>
+                              <a:ea typeface="+mn-ea"/>
+                              <a:cs typeface="+mn-cs"/>
                             </a:rPr>
-                            <a:t>5.9</a:t>
+                            <a:t>6.7</a:t>
                           </a:r>
+                          <a:endParaRPr lang="en-SG" sz="1600" dirty="0">
+                            <a:effectLst/>
+                          </a:endParaRPr>
                         </a:p>
                       </a:txBody>
                       <a:tcPr anchor="ctr"/>
@@ -14546,11 +14564,20 @@
                             <a:buNone/>
                           </a:pPr>
                           <a:r>
-                            <a:rPr lang="en-SG" sz="1600">
+                            <a:rPr lang="en-SG" sz="1800" b="0" i="0" kern="1200" dirty="0">
+                              <a:solidFill>
+                                <a:schemeClr val="dk1"/>
+                              </a:solidFill>
                               <a:effectLst/>
+                              <a:latin typeface="+mn-lt"/>
+                              <a:ea typeface="+mn-ea"/>
+                              <a:cs typeface="+mn-cs"/>
                             </a:rPr>
-                            <a:t>6.5</a:t>
+                            <a:t>7.39</a:t>
                           </a:r>
+                          <a:endParaRPr lang="en-SG" sz="1600" dirty="0">
+                            <a:effectLst/>
+                          </a:endParaRPr>
                         </a:p>
                       </a:txBody>
                       <a:tcPr anchor="ctr"/>
@@ -14607,11 +14634,20 @@
                             <a:buNone/>
                           </a:pPr>
                           <a:r>
-                            <a:rPr lang="en-SG" sz="1600">
+                            <a:rPr lang="en-SG" sz="1800" b="0" i="0" kern="1200" dirty="0">
+                              <a:solidFill>
+                                <a:schemeClr val="dk1"/>
+                              </a:solidFill>
                               <a:effectLst/>
+                              <a:latin typeface="+mn-lt"/>
+                              <a:ea typeface="+mn-ea"/>
+                              <a:cs typeface="+mn-cs"/>
                             </a:rPr>
-                            <a:t>79.5</a:t>
+                            <a:t>86.8</a:t>
                           </a:r>
+                          <a:endParaRPr lang="en-SG" sz="1600" dirty="0">
+                            <a:effectLst/>
+                          </a:endParaRPr>
                         </a:p>
                       </a:txBody>
                       <a:tcPr anchor="ctr"/>
@@ -14737,11 +14773,20 @@
                             <a:buNone/>
                           </a:pPr>
                           <a:r>
-                            <a:rPr lang="en-SG" sz="1600" dirty="0">
+                            <a:rPr lang="en-SG" sz="1800" b="0" i="0" kern="1200" dirty="0">
+                              <a:solidFill>
+                                <a:schemeClr val="dk1"/>
+                              </a:solidFill>
                               <a:effectLst/>
+                              <a:latin typeface="+mn-lt"/>
+                              <a:ea typeface="+mn-ea"/>
+                              <a:cs typeface="+mn-cs"/>
                             </a:rPr>
-                            <a:t>82.4</a:t>
+                            <a:t>89.7</a:t>
                           </a:r>
+                          <a:endParaRPr lang="en-SG" sz="1600" dirty="0">
+                            <a:effectLst/>
+                          </a:endParaRPr>
                         </a:p>
                       </a:txBody>
                       <a:tcPr anchor="ctr"/>
@@ -14757,7 +14802,7 @@
             </a:graphic>
           </p:graphicFrame>
         </mc:Choice>
-        <mc:Fallback xmlns="">
+        <mc:Fallback>
           <p:graphicFrame>
             <p:nvGraphicFramePr>
               <p:cNvPr id="5" name="Table 4">
@@ -14773,14 +14818,14 @@
               <p:nvPr>
                 <p:extLst>
                   <p:ext uri="{D42A27DB-BD31-4B8C-83A1-F6EECF244321}">
-                    <p14:modId xmlns:p14="http://schemas.microsoft.com/office/powerpoint/2010/main" val="644013560"/>
+                    <p14:modId xmlns:p14="http://schemas.microsoft.com/office/powerpoint/2010/main" val="386418082"/>
                   </p:ext>
                 </p:extLst>
               </p:nvPr>
             </p:nvGraphicFramePr>
             <p:xfrm>
               <a:off x="6696365" y="2588471"/>
-              <a:ext cx="5292204" cy="3250311"/>
+              <a:ext cx="5292204" cy="3372231"/>
             </p:xfrm>
             <a:graphic>
               <a:graphicData uri="http://schemas.openxmlformats.org/drawingml/2006/table">
@@ -15003,7 +15048,7 @@
                       </a:ext>
                     </a:extLst>
                   </a:tr>
-                  <a:tr h="335280">
+                  <a:tr h="365760">
                     <a:tc>
                       <a:txBody>
                         <a:bodyPr/>
@@ -15049,11 +15094,20 @@
                             <a:buNone/>
                           </a:pPr>
                           <a:r>
-                            <a:rPr lang="en-SG" sz="1600" dirty="0">
+                            <a:rPr lang="en-SG" sz="1800" b="0" i="0" kern="1200" dirty="0">
+                              <a:solidFill>
+                                <a:schemeClr val="dk1"/>
+                              </a:solidFill>
                               <a:effectLst/>
+                              <a:latin typeface="+mn-lt"/>
+                              <a:ea typeface="+mn-ea"/>
+                              <a:cs typeface="+mn-cs"/>
                             </a:rPr>
-                            <a:t>4.0</a:t>
+                            <a:t>4.6</a:t>
                           </a:r>
+                          <a:endParaRPr lang="en-SG" sz="1600" dirty="0">
+                            <a:effectLst/>
+                          </a:endParaRPr>
                         </a:p>
                       </a:txBody>
                       <a:tcPr anchor="ctr"/>
@@ -15064,7 +15118,7 @@
                       </a:ext>
                     </a:extLst>
                   </a:tr>
-                  <a:tr h="335280">
+                  <a:tr h="365760">
                     <a:tc>
                       <a:txBody>
                         <a:bodyPr/>
@@ -15110,11 +15164,20 @@
                             <a:buNone/>
                           </a:pPr>
                           <a:r>
-                            <a:rPr lang="en-SG" sz="1600" dirty="0">
+                            <a:rPr lang="en-SG" sz="1800" b="0" i="0" kern="1200" dirty="0">
+                              <a:solidFill>
+                                <a:schemeClr val="dk1"/>
+                              </a:solidFill>
                               <a:effectLst/>
+                              <a:latin typeface="+mn-lt"/>
+                              <a:ea typeface="+mn-ea"/>
+                              <a:cs typeface="+mn-cs"/>
                             </a:rPr>
-                            <a:t>5.9</a:t>
+                            <a:t>6.7</a:t>
                           </a:r>
+                          <a:endParaRPr lang="en-SG" sz="1600" dirty="0">
+                            <a:effectLst/>
+                          </a:endParaRPr>
                         </a:p>
                       </a:txBody>
                       <a:tcPr anchor="ctr"/>
@@ -15125,7 +15188,7 @@
                       </a:ext>
                     </a:extLst>
                   </a:tr>
-                  <a:tr h="335280">
+                  <a:tr h="365760">
                     <a:tc>
                       <a:txBody>
                         <a:bodyPr/>
@@ -15171,11 +15234,20 @@
                             <a:buNone/>
                           </a:pPr>
                           <a:r>
-                            <a:rPr lang="en-SG" sz="1600">
+                            <a:rPr lang="en-SG" sz="1800" b="0" i="0" kern="1200" dirty="0">
+                              <a:solidFill>
+                                <a:schemeClr val="dk1"/>
+                              </a:solidFill>
                               <a:effectLst/>
+                              <a:latin typeface="+mn-lt"/>
+                              <a:ea typeface="+mn-ea"/>
+                              <a:cs typeface="+mn-cs"/>
                             </a:rPr>
-                            <a:t>6.5</a:t>
+                            <a:t>7.39</a:t>
                           </a:r>
+                          <a:endParaRPr lang="en-SG" sz="1600" dirty="0">
+                            <a:effectLst/>
+                          </a:endParaRPr>
                         </a:p>
                       </a:txBody>
                       <a:tcPr anchor="ctr"/>
@@ -15186,7 +15258,7 @@
                       </a:ext>
                     </a:extLst>
                   </a:tr>
-                  <a:tr h="335280">
+                  <a:tr h="365760">
                     <a:tc>
                       <a:txBody>
                         <a:bodyPr/>
@@ -15232,11 +15304,20 @@
                             <a:buNone/>
                           </a:pPr>
                           <a:r>
-                            <a:rPr lang="en-SG" sz="1600">
+                            <a:rPr lang="en-SG" sz="1800" b="0" i="0" kern="1200" dirty="0">
+                              <a:solidFill>
+                                <a:schemeClr val="dk1"/>
+                              </a:solidFill>
                               <a:effectLst/>
+                              <a:latin typeface="+mn-lt"/>
+                              <a:ea typeface="+mn-ea"/>
+                              <a:cs typeface="+mn-cs"/>
                             </a:rPr>
-                            <a:t>79.5</a:t>
+                            <a:t>86.8</a:t>
                           </a:r>
+                          <a:endParaRPr lang="en-SG" sz="1600" dirty="0">
+                            <a:effectLst/>
+                          </a:endParaRPr>
                         </a:p>
                       </a:txBody>
                       <a:tcPr anchor="ctr"/>
@@ -15260,7 +15341,7 @@
                         <a:blipFill>
                           <a:blip r:embed="rId2"/>
                           <a:stretch>
-                            <a:fillRect l="-345" t="-450000" r="-201034" b="-13265"/>
+                            <a:fillRect l="-345" t="-470408" r="-201034" b="-13265"/>
                           </a:stretch>
                         </a:blipFill>
                       </a:tcPr>
@@ -15292,11 +15373,20 @@
                             <a:buNone/>
                           </a:pPr>
                           <a:r>
-                            <a:rPr lang="en-SG" sz="1600" dirty="0">
+                            <a:rPr lang="en-SG" sz="1800" b="0" i="0" kern="1200" dirty="0">
+                              <a:solidFill>
+                                <a:schemeClr val="dk1"/>
+                              </a:solidFill>
                               <a:effectLst/>
+                              <a:latin typeface="+mn-lt"/>
+                              <a:ea typeface="+mn-ea"/>
+                              <a:cs typeface="+mn-cs"/>
                             </a:rPr>
-                            <a:t>82.4</a:t>
+                            <a:t>89.7</a:t>
                           </a:r>
+                          <a:endParaRPr lang="en-SG" sz="1600" dirty="0">
+                            <a:effectLst/>
+                          </a:endParaRPr>
                         </a:p>
                       </a:txBody>
                       <a:tcPr anchor="ctr"/>
@@ -15362,8 +15452,8 @@
           </a:p>
         </p:txBody>
       </p:sp>
-      <mc:AlternateContent xmlns:mc="http://schemas.openxmlformats.org/markup-compatibility/2006" xmlns:a14="http://schemas.microsoft.com/office/drawing/2010/main">
-        <mc:Choice Requires="a14">
+      <mc:AlternateContent xmlns:mc="http://schemas.openxmlformats.org/markup-compatibility/2006">
+        <mc:Choice xmlns:a14="http://schemas.microsoft.com/office/drawing/2010/main" Requires="a14">
           <p:graphicFrame>
             <p:nvGraphicFramePr>
               <p:cNvPr id="3" name="Table 2">
@@ -15379,7 +15469,7 @@
               <p:nvPr>
                 <p:extLst>
                   <p:ext uri="{D42A27DB-BD31-4B8C-83A1-F6EECF244321}">
-                    <p14:modId xmlns:p14="http://schemas.microsoft.com/office/powerpoint/2010/main" val="1967801246"/>
+                    <p14:modId xmlns:p14="http://schemas.microsoft.com/office/powerpoint/2010/main" val="3574334626"/>
                   </p:ext>
                 </p:extLst>
               </p:nvPr>
@@ -15670,7 +15760,7 @@
                             <a:rPr lang="en-SG" sz="1600" dirty="0">
                               <a:effectLst/>
                             </a:rPr>
-                            <a:t>.1</a:t>
+                            <a:t>.48</a:t>
                           </a:r>
                         </a:p>
                       </a:txBody>
@@ -15737,14 +15827,11 @@
                             <a:rPr lang="en-US" sz="1600" dirty="0">
                               <a:effectLst/>
                             </a:rPr>
-                            <a:t>4</a:t>
+                            <a:t>5.52</a:t>
                           </a:r>
-                          <a:r>
-                            <a:rPr lang="en-SG" sz="1600" dirty="0">
-                              <a:effectLst/>
-                            </a:rPr>
-                            <a:t>.9</a:t>
-                          </a:r>
+                          <a:endParaRPr lang="en-SG" sz="1600" dirty="0">
+                            <a:effectLst/>
+                          </a:endParaRPr>
                         </a:p>
                       </a:txBody>
                       <a:tcPr anchor="ctr"/>
@@ -15810,14 +15897,11 @@
                             <a:rPr lang="en-US" sz="1600" dirty="0">
                               <a:effectLst/>
                             </a:rPr>
-                            <a:t>5</a:t>
+                            <a:t>6.32</a:t>
                           </a:r>
-                          <a:r>
-                            <a:rPr lang="en-SG" sz="1600" dirty="0">
-                              <a:effectLst/>
-                            </a:rPr>
-                            <a:t>.6</a:t>
-                          </a:r>
+                          <a:endParaRPr lang="en-SG" sz="1600" dirty="0">
+                            <a:effectLst/>
+                          </a:endParaRPr>
                         </a:p>
                       </a:txBody>
                       <a:tcPr anchor="ctr"/>
@@ -15883,14 +15967,11 @@
                             <a:rPr lang="en-US" sz="1600" dirty="0">
                               <a:effectLst/>
                             </a:rPr>
-                            <a:t>5</a:t>
+                            <a:t>64.76</a:t>
                           </a:r>
-                          <a:r>
-                            <a:rPr lang="en-SG" sz="1600" dirty="0">
-                              <a:effectLst/>
-                            </a:rPr>
-                            <a:t>9.6</a:t>
-                          </a:r>
+                          <a:endParaRPr lang="en-SG" sz="1600" dirty="0">
+                            <a:effectLst/>
+                          </a:endParaRPr>
                         </a:p>
                       </a:txBody>
                       <a:tcPr anchor="ctr"/>
@@ -16019,7 +16100,7 @@
                             <a:rPr lang="en-US" sz="1600" dirty="0">
                               <a:effectLst/>
                             </a:rPr>
-                            <a:t>63.33</a:t>
+                            <a:t>68.56</a:t>
                           </a:r>
                           <a:endParaRPr lang="en-SG" sz="1600" dirty="0">
                             <a:effectLst/>
@@ -16039,7 +16120,7 @@
             </a:graphic>
           </p:graphicFrame>
         </mc:Choice>
-        <mc:Fallback xmlns="">
+        <mc:Fallback>
           <p:graphicFrame>
             <p:nvGraphicFramePr>
               <p:cNvPr id="3" name="Table 2">
@@ -16055,7 +16136,7 @@
               <p:nvPr>
                 <p:extLst>
                   <p:ext uri="{D42A27DB-BD31-4B8C-83A1-F6EECF244321}">
-                    <p14:modId xmlns:p14="http://schemas.microsoft.com/office/powerpoint/2010/main" val="1967801246"/>
+                    <p14:modId xmlns:p14="http://schemas.microsoft.com/office/powerpoint/2010/main" val="3574334626"/>
                   </p:ext>
                 </p:extLst>
               </p:nvPr>
@@ -16346,7 +16427,7 @@
                             <a:rPr lang="en-SG" sz="1600" dirty="0">
                               <a:effectLst/>
                             </a:rPr>
-                            <a:t>.1</a:t>
+                            <a:t>.48</a:t>
                           </a:r>
                         </a:p>
                       </a:txBody>
@@ -16413,14 +16494,11 @@
                             <a:rPr lang="en-US" sz="1600" dirty="0">
                               <a:effectLst/>
                             </a:rPr>
-                            <a:t>4</a:t>
+                            <a:t>5.52</a:t>
                           </a:r>
-                          <a:r>
-                            <a:rPr lang="en-SG" sz="1600" dirty="0">
-                              <a:effectLst/>
-                            </a:rPr>
-                            <a:t>.9</a:t>
-                          </a:r>
+                          <a:endParaRPr lang="en-SG" sz="1600" dirty="0">
+                            <a:effectLst/>
+                          </a:endParaRPr>
                         </a:p>
                       </a:txBody>
                       <a:tcPr anchor="ctr"/>
@@ -16486,14 +16564,11 @@
                             <a:rPr lang="en-US" sz="1600" dirty="0">
                               <a:effectLst/>
                             </a:rPr>
-                            <a:t>5</a:t>
+                            <a:t>6.32</a:t>
                           </a:r>
-                          <a:r>
-                            <a:rPr lang="en-SG" sz="1600" dirty="0">
-                              <a:effectLst/>
-                            </a:rPr>
-                            <a:t>.6</a:t>
-                          </a:r>
+                          <a:endParaRPr lang="en-SG" sz="1600" dirty="0">
+                            <a:effectLst/>
+                          </a:endParaRPr>
                         </a:p>
                       </a:txBody>
                       <a:tcPr anchor="ctr"/>
@@ -16559,14 +16634,11 @@
                             <a:rPr lang="en-US" sz="1600" dirty="0">
                               <a:effectLst/>
                             </a:rPr>
-                            <a:t>5</a:t>
+                            <a:t>64.76</a:t>
                           </a:r>
-                          <a:r>
-                            <a:rPr lang="en-SG" sz="1600" dirty="0">
-                              <a:effectLst/>
-                            </a:rPr>
-                            <a:t>9.6</a:t>
-                          </a:r>
+                          <a:endParaRPr lang="en-SG" sz="1600" dirty="0">
+                            <a:effectLst/>
+                          </a:endParaRPr>
                         </a:p>
                       </a:txBody>
                       <a:tcPr anchor="ctr"/>
@@ -16625,7 +16697,7 @@
                             <a:rPr lang="en-US" sz="1600" dirty="0">
                               <a:effectLst/>
                             </a:rPr>
-                            <a:t>63.33</a:t>
+                            <a:t>68.56</a:t>
                           </a:r>
                           <a:endParaRPr lang="en-SG" sz="1600" dirty="0">
                             <a:effectLst/>
